--- a/самоуправление_сильные.pptx
+++ b/самоуправление_сильные.pptx
@@ -12,9 +12,6 @@
     <p:sldId id="260" r:id="rId6"/>
     <p:sldId id="261" r:id="rId7"/>
     <p:sldId id="262" r:id="rId8"/>
-    <p:sldId id="263" r:id="rId9"/>
-    <p:sldId id="264" r:id="rId10"/>
-    <p:sldId id="265" r:id="rId11"/>
   </p:sldIdLst>
   <p:sldSz cx="12192000" cy="6858000"/>
   <p:notesSz cx="6858000" cy="9144000"/>
@@ -113,6 +110,11 @@
       </a:defRPr>
     </a:lvl9pPr>
   </p:defaultTextStyle>
+  <p:extLst>
+    <p:ext uri="{EFAFB233-063F-42B5-8137-9DF3F51BA10A}">
+      <p15:sldGuideLst xmlns:p15="http://schemas.microsoft.com/office/powerpoint/2012/main"/>
+    </p:ext>
+  </p:extLst>
 </p:presentation>
 </file>
 
@@ -3483,42 +3485,6 @@
 </p:sld>
 </file>
 
-<file path=ppt/slides/slide10.xml><?xml version="1.0" encoding="utf-8"?>
-<p:sld xmlns:a="http://schemas.openxmlformats.org/drawingml/2006/main" xmlns:r="http://schemas.openxmlformats.org/officeDocument/2006/relationships" xmlns:p="http://schemas.openxmlformats.org/presentationml/2006/main">
-  <p:cSld>
-    <p:spTree>
-      <p:nvGrpSpPr>
-        <p:cNvPr id="1" name="">
-          <a:extLst>
-            <a:ext uri="{FF2B5EF4-FFF2-40B4-BE49-F238E27FC236}">
-              <a16:creationId xmlns:a16="http://schemas.microsoft.com/office/drawing/2014/main" id="{FCC8B7FE-0F94-0CBD-760F-56F2C1B2B51E}"/>
-            </a:ext>
-          </a:extLst>
-        </p:cNvPr>
-        <p:cNvGrpSpPr/>
-        <p:nvPr/>
-      </p:nvGrpSpPr>
-      <p:grpSpPr>
-        <a:xfrm>
-          <a:off x="0" y="0"/>
-          <a:ext cx="0" cy="0"/>
-          <a:chOff x="0" y="0"/>
-          <a:chExt cx="0" cy="0"/>
-        </a:xfrm>
-      </p:grpSpPr>
-    </p:spTree>
-    <p:extLst>
-      <p:ext uri="{BB962C8B-B14F-4D97-AF65-F5344CB8AC3E}">
-        <p14:creationId xmlns:p14="http://schemas.microsoft.com/office/powerpoint/2010/main" val="249248116"/>
-      </p:ext>
-    </p:extLst>
-  </p:cSld>
-  <p:clrMapOvr>
-    <a:masterClrMapping/>
-  </p:clrMapOvr>
-</p:sld>
-</file>
-
 <file path=ppt/slides/slide2.xml><?xml version="1.0" encoding="utf-8"?>
 <p:sld xmlns:a="http://schemas.openxmlformats.org/drawingml/2006/main" xmlns:r="http://schemas.openxmlformats.org/officeDocument/2006/relationships" xmlns:p="http://schemas.openxmlformats.org/presentationml/2006/main">
   <p:cSld>
@@ -3588,8 +3554,8 @@
         </p:blipFill>
         <p:spPr>
           <a:xfrm>
-            <a:off x="0" y="2327391"/>
-            <a:ext cx="12192000" cy="2203218"/>
+            <a:off x="-81481" y="2281473"/>
+            <a:ext cx="12273481" cy="2270602"/>
           </a:xfrm>
           <a:prstGeom prst="rect">
             <a:avLst/>
@@ -3714,8 +3680,8 @@
         </p:blipFill>
         <p:spPr>
           <a:xfrm>
-            <a:off x="0" y="2601798"/>
-            <a:ext cx="12192000" cy="2170608"/>
+            <a:off x="0" y="2525917"/>
+            <a:ext cx="12192000" cy="2344847"/>
           </a:xfrm>
           <a:prstGeom prst="rect">
             <a:avLst/>
@@ -4050,78 +4016,6 @@
     <p:extLst>
       <p:ext uri="{BB962C8B-B14F-4D97-AF65-F5344CB8AC3E}">
         <p14:creationId xmlns:p14="http://schemas.microsoft.com/office/powerpoint/2010/main" val="1134599062"/>
-      </p:ext>
-    </p:extLst>
-  </p:cSld>
-  <p:clrMapOvr>
-    <a:masterClrMapping/>
-  </p:clrMapOvr>
-</p:sld>
-</file>
-
-<file path=ppt/slides/slide8.xml><?xml version="1.0" encoding="utf-8"?>
-<p:sld xmlns:a="http://schemas.openxmlformats.org/drawingml/2006/main" xmlns:r="http://schemas.openxmlformats.org/officeDocument/2006/relationships" xmlns:p="http://schemas.openxmlformats.org/presentationml/2006/main">
-  <p:cSld>
-    <p:spTree>
-      <p:nvGrpSpPr>
-        <p:cNvPr id="1" name="">
-          <a:extLst>
-            <a:ext uri="{FF2B5EF4-FFF2-40B4-BE49-F238E27FC236}">
-              <a16:creationId xmlns:a16="http://schemas.microsoft.com/office/drawing/2014/main" id="{F8AD8425-C31F-7AF4-E77C-7B38AB20BA9D}"/>
-            </a:ext>
-          </a:extLst>
-        </p:cNvPr>
-        <p:cNvGrpSpPr/>
-        <p:nvPr/>
-      </p:nvGrpSpPr>
-      <p:grpSpPr>
-        <a:xfrm>
-          <a:off x="0" y="0"/>
-          <a:ext cx="0" cy="0"/>
-          <a:chOff x="0" y="0"/>
-          <a:chExt cx="0" cy="0"/>
-        </a:xfrm>
-      </p:grpSpPr>
-    </p:spTree>
-    <p:extLst>
-      <p:ext uri="{BB962C8B-B14F-4D97-AF65-F5344CB8AC3E}">
-        <p14:creationId xmlns:p14="http://schemas.microsoft.com/office/powerpoint/2010/main" val="3740326794"/>
-      </p:ext>
-    </p:extLst>
-  </p:cSld>
-  <p:clrMapOvr>
-    <a:masterClrMapping/>
-  </p:clrMapOvr>
-</p:sld>
-</file>
-
-<file path=ppt/slides/slide9.xml><?xml version="1.0" encoding="utf-8"?>
-<p:sld xmlns:a="http://schemas.openxmlformats.org/drawingml/2006/main" xmlns:r="http://schemas.openxmlformats.org/officeDocument/2006/relationships" xmlns:p="http://schemas.openxmlformats.org/presentationml/2006/main">
-  <p:cSld>
-    <p:spTree>
-      <p:nvGrpSpPr>
-        <p:cNvPr id="1" name="">
-          <a:extLst>
-            <a:ext uri="{FF2B5EF4-FFF2-40B4-BE49-F238E27FC236}">
-              <a16:creationId xmlns:a16="http://schemas.microsoft.com/office/drawing/2014/main" id="{8ACC1362-A144-F274-3451-1AFCDC65245B}"/>
-            </a:ext>
-          </a:extLst>
-        </p:cNvPr>
-        <p:cNvGrpSpPr/>
-        <p:nvPr/>
-      </p:nvGrpSpPr>
-      <p:grpSpPr>
-        <a:xfrm>
-          <a:off x="0" y="0"/>
-          <a:ext cx="0" cy="0"/>
-          <a:chOff x="0" y="0"/>
-          <a:chExt cx="0" cy="0"/>
-        </a:xfrm>
-      </p:grpSpPr>
-    </p:spTree>
-    <p:extLst>
-      <p:ext uri="{BB962C8B-B14F-4D97-AF65-F5344CB8AC3E}">
-        <p14:creationId xmlns:p14="http://schemas.microsoft.com/office/powerpoint/2010/main" val="133307790"/>
       </p:ext>
     </p:extLst>
   </p:cSld>
